--- a/public/fun/pack/pptx/family/가족소개_31_우리부부_은행잎길.pptx
+++ b/public/fun/pack/pptx/family/가족소개_31_우리부부_은행잎길.pptx
@@ -3286,6 +3286,14 @@
 <file path=ppt/slides/slide1.xml><?xml version="1.0" encoding="utf-8"?>
 <p:sld xmlns:a="http://schemas.openxmlformats.org/drawingml/2006/main" xmlns:p="http://schemas.openxmlformats.org/presentationml/2006/main" xmlns:r="http://schemas.openxmlformats.org/officeDocument/2006/relationships">
   <p:cSld>
+    <p:bg>
+      <p:bgPr>
+        <a:solidFill>
+          <a:srgbClr val="FBF8EC"/>
+        </a:solidFill>
+        <a:effectLst/>
+      </p:bgPr>
+    </p:bg>
     <p:spTree>
       <p:nvGrpSpPr>
         <p:cNvPr id="1" name=""/>
@@ -3293,30 +3301,119 @@
         <p:nvPr/>
       </p:nvGrpSpPr>
       <p:grpSpPr/>
-      <p:pic>
-        <p:nvPicPr>
-          <p:cNvPr id="3" name="표지 그림" descr="family-31.jpg"/>
-          <p:cNvPicPr>
-            <a:picLocks noChangeAspect="1"/>
-          </p:cNvPicPr>
-          <p:nvPr/>
-        </p:nvPicPr>
-        <p:blipFill>
-          <a:blip r:embed="rId2"/>
-          <a:stretch>
-            <a:fillRect/>
-          </a:stretch>
-        </p:blipFill>
-        <p:spPr>
-          <a:xfrm>
-            <a:off x="0" y="0"/>
-            <a:ext cx="12191695" cy="6858000"/>
+      <p:sp>
+        <p:nvSpPr>
+          <p:cNvPr id="3" name="사진 자리"/>
+          <p:cNvSpPr/>
+          <p:nvPr/>
+        </p:nvSpPr>
+        <p:spPr>
+          <a:xfrm>
+            <a:off x="1463003" y="685800"/>
+            <a:ext cx="3169840" cy="5486400"/>
+          </a:xfrm>
+          <a:prstGeom prst="round2SameRect">
+            <a:avLst>
+              <a:gd name="adj1" fmla="val 50000"/>
+              <a:gd name="adj2" fmla="val 0"/>
+            </a:avLst>
+          </a:prstGeom>
+          <a:solidFill>
+            <a:srgbClr val="EBDEAD"/>
+          </a:solidFill>
+          <a:ln>
+            <a:noFill/>
+          </a:ln>
+        </p:spPr>
+        <p:txBody>
+          <a:bodyPr rtlCol="0" anchor="ctr" wrap="square" lIns="54864" rIns="54864" tIns="27432" bIns="27432">
+            <a:noAutofit/>
+          </a:bodyPr>
+          <a:lstStyle/>
+          <a:p>
+            <a:pPr algn="ctr">
+              <a:lnSpc>
+                <a:spcPct val="100000"/>
+              </a:lnSpc>
+            </a:pPr>
+            <a:r>
+              <a:rPr sz="1400" b="0" i="0">
+                <a:solidFill>
+                  <a:srgbClr val="494227"/>
+                </a:solidFill>
+              </a:rPr>
+              <a:t>사진을 넣어 주세요</a:t>
+            </a:r>
+          </a:p>
+        </p:txBody>
+      </p:sp>
+      <p:sp>
+        <p:nvSpPr>
+          <p:cNvPr id="4" name="장식"/>
+          <p:cNvSpPr/>
+          <p:nvPr/>
+        </p:nvSpPr>
+        <p:spPr>
+          <a:xfrm>
+            <a:off x="4358505" y="4251960"/>
+            <a:ext cx="1005840" cy="1005840"/>
+          </a:xfrm>
+          <a:prstGeom prst="ellipse">
+            <a:avLst/>
+          </a:prstGeom>
+          <a:solidFill>
+            <a:srgbClr val="EBDEAD"/>
+          </a:solidFill>
+          <a:ln>
+            <a:noFill/>
+          </a:ln>
+        </p:spPr>
+        <p:txBody>
+          <a:bodyPr rtlCol="0" anchor="ctr"/>
+          <a:lstStyle/>
+          <a:p>
+            <a:pPr algn="ctr"/>
+          </a:p>
+        </p:txBody>
+      </p:sp>
+      <p:sp>
+        <p:nvSpPr>
+          <p:cNvPr id="5" name="라벨"/>
+          <p:cNvSpPr txBox="1"/>
+          <p:nvPr/>
+        </p:nvSpPr>
+        <p:spPr>
+          <a:xfrm>
+            <a:off x="6827349" y="2148840"/>
+            <a:ext cx="4632844" cy="274320"/>
           </a:xfrm>
           <a:prstGeom prst="rect">
             <a:avLst/>
           </a:prstGeom>
-        </p:spPr>
-      </p:pic>
+          <a:noFill/>
+        </p:spPr>
+        <p:txBody>
+          <a:bodyPr wrap="square" lIns="54864" rIns="54864" tIns="27432" bIns="27432" anchor="t">
+            <a:noAutofit/>
+          </a:bodyPr>
+          <a:lstStyle/>
+          <a:p>
+            <a:pPr algn="l">
+              <a:lnSpc>
+                <a:spcPct val="115000"/>
+              </a:lnSpc>
+            </a:pPr>
+            <a:r>
+              <a:rPr sz="1000" b="1" i="0" spc="250">
+                <a:solidFill>
+                  <a:srgbClr val="26231F"/>
+                </a:solidFill>
+              </a:rPr>
+              <a:t>FAMILY ALBUM</a:t>
+            </a:r>
+          </a:p>
+        </p:txBody>
+      </p:sp>
       <p:sp>
         <p:nvSpPr>
           <p:cNvPr id="2" name="Title 1"/>
@@ -3329,8 +3426,8 @@
         </p:nvSpPr>
         <p:spPr>
           <a:xfrm>
-            <a:off x="853418" y="2057400"/>
-            <a:ext cx="6095847" cy="1554480"/>
+            <a:off x="6827349" y="2606040"/>
+            <a:ext cx="4632844" cy="1188720"/>
           </a:xfrm>
         </p:spPr>
         <p:txBody>
@@ -3345,9 +3442,9 @@
               </a:lnSpc>
             </a:pPr>
             <a:r>
-              <a:rPr sz="3600" b="1" i="0">
-                <a:solidFill>
-                  <a:srgbClr val="756110"/>
+              <a:rPr sz="4000" b="1" i="0">
+                <a:solidFill>
+                  <a:srgbClr val="26231F"/>
                 </a:solidFill>
               </a:rPr>
               <a:t>우리 가족을 소개합니다</a:t>
@@ -3357,14 +3454,14 @@
       </p:sp>
       <p:sp>
         <p:nvSpPr>
-          <p:cNvPr id="4" name="한 줄 문구"/>
+          <p:cNvPr id="6" name="한 줄 문구"/>
           <p:cNvSpPr txBox="1"/>
           <p:nvPr/>
         </p:nvSpPr>
         <p:spPr>
           <a:xfrm>
-            <a:off x="853418" y="3749039"/>
-            <a:ext cx="6095847" cy="822960"/>
+            <a:off x="6827349" y="3886200"/>
+            <a:ext cx="4632844" cy="822960"/>
           </a:xfrm>
           <a:prstGeom prst="rect">
             <a:avLst/>
@@ -3383,9 +3480,9 @@
               </a:lnSpc>
             </a:pPr>
             <a:r>
-              <a:rPr sz="1700" b="0" i="1">
-                <a:solidFill>
-                  <a:srgbClr val="756110"/>
+              <a:rPr sz="1700" b="0" i="0">
+                <a:solidFill>
+                  <a:srgbClr val="26231F"/>
                 </a:solidFill>
               </a:rPr>
               <a:t>은행잎 밟으며 걷던 아침</a:t>
@@ -3395,14 +3492,14 @@
       </p:sp>
       <p:sp>
         <p:nvSpPr>
-          <p:cNvPr id="5" name="안내 문구"/>
+          <p:cNvPr id="7" name="안내 문구"/>
           <p:cNvSpPr txBox="1"/>
           <p:nvPr/>
         </p:nvSpPr>
         <p:spPr>
           <a:xfrm>
-            <a:off x="853418" y="4617720"/>
-            <a:ext cx="6095847" cy="914400"/>
+            <a:off x="6827349" y="4754880"/>
+            <a:ext cx="4632844" cy="914400"/>
           </a:xfrm>
           <a:prstGeom prst="rect">
             <a:avLst/>
@@ -3423,10 +3520,10 @@
             <a:r>
               <a:rPr sz="1400" b="0" i="0">
                 <a:solidFill>
-                  <a:srgbClr val="666666"/>
+                  <a:srgbClr val="26231F"/>
                 </a:solidFill>
               </a:rPr>
-              <a:t>우리 부부 · 2027. 00. 00</a:t>
+              <a:t>우리 부부 · 날짜 입력</a:t>
             </a:r>
           </a:p>
         </p:txBody>
@@ -3445,7 +3542,7 @@
     <p:bg>
       <p:bgPr>
         <a:solidFill>
-          <a:srgbClr val="CEAB1C"/>
+          <a:srgbClr val="F6EFD5"/>
         </a:solidFill>
         <a:effectLst/>
       </p:bgPr>
@@ -3465,13 +3562,78 @@
         </p:nvSpPr>
         <p:spPr>
           <a:xfrm>
-            <a:off x="274320" y="274320"/>
-            <a:ext cx="11643055" cy="6309360"/>
-          </a:xfrm>
-          <a:prstGeom prst="roundRect">
-            <a:avLst>
-              <a:gd name="adj" fmla="val 3500"/>
-            </a:avLst>
+            <a:off x="10180015" y="-1645920"/>
+            <a:ext cx="3474720" cy="3474720"/>
+          </a:xfrm>
+          <a:prstGeom prst="ellipse">
+            <a:avLst/>
+          </a:prstGeom>
+          <a:solidFill>
+            <a:srgbClr val="EBDEAD"/>
+          </a:solidFill>
+          <a:ln>
+            <a:noFill/>
+          </a:ln>
+        </p:spPr>
+        <p:txBody>
+          <a:bodyPr rtlCol="0" anchor="ctr"/>
+          <a:lstStyle/>
+          <a:p>
+            <a:pPr algn="ctr"/>
+          </a:p>
+        </p:txBody>
+      </p:sp>
+      <p:sp>
+        <p:nvSpPr>
+          <p:cNvPr id="4" name="상단 라벨"/>
+          <p:cNvSpPr txBox="1"/>
+          <p:nvPr/>
+        </p:nvSpPr>
+        <p:spPr>
+          <a:xfrm>
+            <a:off x="640080" y="274320"/>
+            <a:ext cx="5486400" cy="274320"/>
+          </a:xfrm>
+          <a:prstGeom prst="rect">
+            <a:avLst/>
+          </a:prstGeom>
+          <a:noFill/>
+        </p:spPr>
+        <p:txBody>
+          <a:bodyPr wrap="square" lIns="54864" rIns="54864" tIns="27432" bIns="27432" anchor="ctr">
+            <a:noAutofit/>
+          </a:bodyPr>
+          <a:lstStyle/>
+          <a:p>
+            <a:pPr algn="l">
+              <a:lnSpc>
+                <a:spcPct val="115000"/>
+              </a:lnSpc>
+            </a:pPr>
+            <a:r>
+              <a:rPr sz="900" b="1" i="0" spc="250">
+                <a:solidFill>
+                  <a:srgbClr val="26231F"/>
+                </a:solidFill>
+              </a:rPr>
+              <a:t>FAMILY ALBUM</a:t>
+            </a:r>
+          </a:p>
+        </p:txBody>
+      </p:sp>
+      <p:sp>
+        <p:nvSpPr>
+          <p:cNvPr id="5" name="포인트"/>
+          <p:cNvSpPr/>
+          <p:nvPr/>
+        </p:nvSpPr>
+        <p:spPr>
+          <a:xfrm>
+            <a:off x="11048695" y="502919"/>
+            <a:ext cx="274320" cy="274320"/>
+          </a:xfrm>
+          <a:prstGeom prst="moon">
+            <a:avLst/>
           </a:prstGeom>
           <a:solidFill>
             <a:srgbClr val="FFFFFF"/>
@@ -3500,8 +3662,8 @@
         </p:nvSpPr>
         <p:spPr>
           <a:xfrm>
-            <a:off x="731520" y="548640"/>
-            <a:ext cx="9448495" cy="868680"/>
+            <a:off x="640080" y="658368"/>
+            <a:ext cx="9082735" cy="868680"/>
           </a:xfrm>
         </p:spPr>
         <p:txBody>
@@ -3518,7 +3680,7 @@
             <a:r>
               <a:rPr sz="3000" b="1" i="0">
                 <a:solidFill>
-                  <a:srgbClr val="756110"/>
+                  <a:srgbClr val="26231F"/>
                 </a:solidFill>
               </a:rPr>
               <a:t>가족 구성원</a:t>
@@ -3528,25 +3690,23 @@
       </p:sp>
       <p:sp>
         <p:nvSpPr>
-          <p:cNvPr id="4" name="사진 자리"/>
+          <p:cNvPr id="6" name="사진 자리"/>
           <p:cNvSpPr/>
           <p:nvPr/>
         </p:nvSpPr>
         <p:spPr>
           <a:xfrm>
-            <a:off x="2202103" y="1600200"/>
-            <a:ext cx="2308860" cy="2308860"/>
+            <a:off x="2167813" y="1783080"/>
+            <a:ext cx="2286000" cy="2286000"/>
           </a:xfrm>
           <a:prstGeom prst="ellipse">
             <a:avLst/>
           </a:prstGeom>
           <a:solidFill>
-            <a:srgbClr val="F9EFC8"/>
+            <a:srgbClr val="F6EFD5"/>
           </a:solidFill>
           <a:ln w="19050">
-            <a:solidFill>
-              <a:srgbClr val="CEAB1C"/>
-            </a:solidFill>
+            <a:noFill/>
             <a:prstDash val="dash"/>
           </a:ln>
         </p:spPr>
@@ -3564,7 +3724,7 @@
             <a:r>
               <a:rPr sz="1200" b="0" i="0">
                 <a:solidFill>
-                  <a:srgbClr val="756110"/>
+                  <a:srgbClr val="8E8780"/>
                 </a:solidFill>
               </a:rPr>
               <a:t>사진</a:t>
@@ -3574,14 +3734,14 @@
       </p:sp>
       <p:sp>
         <p:nvSpPr>
-          <p:cNvPr id="5" name="TextBox 4"/>
+          <p:cNvPr id="7" name="TextBox 6"/>
           <p:cNvSpPr txBox="1"/>
           <p:nvPr/>
         </p:nvSpPr>
         <p:spPr>
           <a:xfrm>
-            <a:off x="731520" y="4000500"/>
-            <a:ext cx="5250027" cy="411480"/>
+            <a:off x="640080" y="4160520"/>
+            <a:ext cx="5341467" cy="411480"/>
           </a:xfrm>
           <a:prstGeom prst="rect">
             <a:avLst/>
@@ -3602,7 +3762,7 @@
             <a:r>
               <a:rPr sz="1600" b="1" i="0">
                 <a:solidFill>
-                  <a:srgbClr val="756110"/>
+                  <a:srgbClr val="494227"/>
                 </a:solidFill>
               </a:rPr>
               <a:t>남편</a:t>
@@ -3612,14 +3772,14 @@
       </p:sp>
       <p:sp>
         <p:nvSpPr>
-          <p:cNvPr id="6" name="TextBox 5"/>
+          <p:cNvPr id="8" name="TextBox 7"/>
           <p:cNvSpPr txBox="1"/>
           <p:nvPr/>
         </p:nvSpPr>
         <p:spPr>
           <a:xfrm>
-            <a:off x="822960" y="4457700"/>
-            <a:ext cx="5067147" cy="1760219"/>
+            <a:off x="731519" y="4617720"/>
+            <a:ext cx="5158587" cy="1737360"/>
           </a:xfrm>
           <a:prstGeom prst="rect">
             <a:avLst/>
@@ -3680,25 +3840,23 @@
       </p:sp>
       <p:sp>
         <p:nvSpPr>
-          <p:cNvPr id="7" name="사진 자리"/>
+          <p:cNvPr id="9" name="사진 자리"/>
           <p:cNvSpPr/>
           <p:nvPr/>
         </p:nvSpPr>
         <p:spPr>
           <a:xfrm>
-            <a:off x="7680731" y="1600200"/>
-            <a:ext cx="2308860" cy="2308860"/>
+            <a:off x="7737881" y="1783080"/>
+            <a:ext cx="2286000" cy="2286000"/>
           </a:xfrm>
           <a:prstGeom prst="ellipse">
             <a:avLst/>
           </a:prstGeom>
           <a:solidFill>
-            <a:srgbClr val="F9EFC8"/>
+            <a:srgbClr val="F6EFD5"/>
           </a:solidFill>
           <a:ln w="19050">
-            <a:solidFill>
-              <a:srgbClr val="CEAB1C"/>
-            </a:solidFill>
+            <a:noFill/>
             <a:prstDash val="dash"/>
           </a:ln>
         </p:spPr>
@@ -3716,7 +3874,7 @@
             <a:r>
               <a:rPr sz="1200" b="0" i="0">
                 <a:solidFill>
-                  <a:srgbClr val="756110"/>
+                  <a:srgbClr val="8E8780"/>
                 </a:solidFill>
               </a:rPr>
               <a:t>사진</a:t>
@@ -3726,14 +3884,14 @@
       </p:sp>
       <p:sp>
         <p:nvSpPr>
-          <p:cNvPr id="8" name="TextBox 7"/>
+          <p:cNvPr id="10" name="TextBox 9"/>
           <p:cNvSpPr txBox="1"/>
           <p:nvPr/>
         </p:nvSpPr>
         <p:spPr>
           <a:xfrm>
-            <a:off x="6210147" y="4000500"/>
-            <a:ext cx="5250027" cy="411480"/>
+            <a:off x="6210147" y="4160520"/>
+            <a:ext cx="5341467" cy="411480"/>
           </a:xfrm>
           <a:prstGeom prst="rect">
             <a:avLst/>
@@ -3754,7 +3912,7 @@
             <a:r>
               <a:rPr sz="1600" b="1" i="0">
                 <a:solidFill>
-                  <a:srgbClr val="756110"/>
+                  <a:srgbClr val="494227"/>
                 </a:solidFill>
               </a:rPr>
               <a:t>아내</a:t>
@@ -3764,14 +3922,14 @@
       </p:sp>
       <p:sp>
         <p:nvSpPr>
-          <p:cNvPr id="9" name="TextBox 8"/>
+          <p:cNvPr id="11" name="TextBox 10"/>
           <p:cNvSpPr txBox="1"/>
           <p:nvPr/>
         </p:nvSpPr>
         <p:spPr>
           <a:xfrm>
-            <a:off x="6301587" y="4457700"/>
-            <a:ext cx="5067147" cy="1760219"/>
+            <a:off x="6301587" y="4617720"/>
+            <a:ext cx="5158587" cy="1737360"/>
           </a:xfrm>
           <a:prstGeom prst="rect">
             <a:avLst/>
@@ -3844,7 +4002,7 @@
     <p:bg>
       <p:bgPr>
         <a:solidFill>
-          <a:srgbClr val="CEAB1C"/>
+          <a:srgbClr val="F6EFD5"/>
         </a:solidFill>
         <a:effectLst/>
       </p:bgPr>
@@ -3864,13 +4022,78 @@
         </p:nvSpPr>
         <p:spPr>
           <a:xfrm>
-            <a:off x="274320" y="274320"/>
-            <a:ext cx="11643055" cy="6309360"/>
-          </a:xfrm>
-          <a:prstGeom prst="roundRect">
-            <a:avLst>
-              <a:gd name="adj" fmla="val 3500"/>
-            </a:avLst>
+            <a:off x="10180015" y="-1645920"/>
+            <a:ext cx="3474720" cy="3474720"/>
+          </a:xfrm>
+          <a:prstGeom prst="ellipse">
+            <a:avLst/>
+          </a:prstGeom>
+          <a:solidFill>
+            <a:srgbClr val="EBDEAD"/>
+          </a:solidFill>
+          <a:ln>
+            <a:noFill/>
+          </a:ln>
+        </p:spPr>
+        <p:txBody>
+          <a:bodyPr rtlCol="0" anchor="ctr"/>
+          <a:lstStyle/>
+          <a:p>
+            <a:pPr algn="ctr"/>
+          </a:p>
+        </p:txBody>
+      </p:sp>
+      <p:sp>
+        <p:nvSpPr>
+          <p:cNvPr id="4" name="상단 라벨"/>
+          <p:cNvSpPr txBox="1"/>
+          <p:nvPr/>
+        </p:nvSpPr>
+        <p:spPr>
+          <a:xfrm>
+            <a:off x="640080" y="274320"/>
+            <a:ext cx="5486400" cy="274320"/>
+          </a:xfrm>
+          <a:prstGeom prst="rect">
+            <a:avLst/>
+          </a:prstGeom>
+          <a:noFill/>
+        </p:spPr>
+        <p:txBody>
+          <a:bodyPr wrap="square" lIns="54864" rIns="54864" tIns="27432" bIns="27432" anchor="ctr">
+            <a:noAutofit/>
+          </a:bodyPr>
+          <a:lstStyle/>
+          <a:p>
+            <a:pPr algn="l">
+              <a:lnSpc>
+                <a:spcPct val="115000"/>
+              </a:lnSpc>
+            </a:pPr>
+            <a:r>
+              <a:rPr sz="900" b="1" i="0" spc="250">
+                <a:solidFill>
+                  <a:srgbClr val="26231F"/>
+                </a:solidFill>
+              </a:rPr>
+              <a:t>FAMILY ALBUM</a:t>
+            </a:r>
+          </a:p>
+        </p:txBody>
+      </p:sp>
+      <p:sp>
+        <p:nvSpPr>
+          <p:cNvPr id="5" name="포인트"/>
+          <p:cNvSpPr/>
+          <p:nvPr/>
+        </p:nvSpPr>
+        <p:spPr>
+          <a:xfrm>
+            <a:off x="11048695" y="502919"/>
+            <a:ext cx="274320" cy="274320"/>
+          </a:xfrm>
+          <a:prstGeom prst="moon">
+            <a:avLst/>
           </a:prstGeom>
           <a:solidFill>
             <a:srgbClr val="FFFFFF"/>
@@ -3899,8 +4122,8 @@
         </p:nvSpPr>
         <p:spPr>
           <a:xfrm>
-            <a:off x="731520" y="548640"/>
-            <a:ext cx="9448495" cy="868680"/>
+            <a:off x="640080" y="658368"/>
+            <a:ext cx="9082735" cy="868680"/>
           </a:xfrm>
         </p:spPr>
         <p:txBody>
@@ -3917,7 +4140,7 @@
             <a:r>
               <a:rPr sz="3000" b="1" i="0">
                 <a:solidFill>
-                  <a:srgbClr val="756110"/>
+                  <a:srgbClr val="26231F"/>
                 </a:solidFill>
               </a:rPr>
               <a:t>우리 가족 이야기</a:t>
@@ -3927,20 +4150,20 @@
       </p:sp>
       <p:sp>
         <p:nvSpPr>
-          <p:cNvPr id="4" name="타임라인 선"/>
+          <p:cNvPr id="6" name="타임라인 선"/>
           <p:cNvSpPr/>
           <p:nvPr/>
         </p:nvSpPr>
         <p:spPr>
           <a:xfrm>
-            <a:off x="731520" y="3337560"/>
-            <a:ext cx="10728655" cy="54864"/>
+            <a:off x="640080" y="3520440"/>
+            <a:ext cx="10911535" cy="54864"/>
           </a:xfrm>
           <a:prstGeom prst="rect">
             <a:avLst/>
           </a:prstGeom>
           <a:solidFill>
-            <a:srgbClr val="F9EFC8"/>
+            <a:srgbClr val="F6EFD5"/>
           </a:solidFill>
           <a:ln>
             <a:noFill/>
@@ -3956,20 +4179,20 @@
       </p:sp>
       <p:sp>
         <p:nvSpPr>
-          <p:cNvPr id="5" name="때 1"/>
+          <p:cNvPr id="7" name="때 1"/>
           <p:cNvSpPr/>
           <p:nvPr/>
         </p:nvSpPr>
         <p:spPr>
           <a:xfrm>
-            <a:off x="1871433" y="3154680"/>
+            <a:off x="1802853" y="3337560"/>
             <a:ext cx="402336" cy="402336"/>
           </a:xfrm>
           <a:prstGeom prst="ellipse">
             <a:avLst/>
           </a:prstGeom>
           <a:solidFill>
-            <a:srgbClr val="CEAB1C"/>
+            <a:srgbClr val="D8C579"/>
           </a:solidFill>
           <a:ln w="38100">
             <a:solidFill>
@@ -3987,14 +4210,14 @@
       </p:sp>
       <p:sp>
         <p:nvSpPr>
-          <p:cNvPr id="6" name="TextBox 5"/>
+          <p:cNvPr id="8" name="TextBox 7"/>
           <p:cNvSpPr txBox="1"/>
           <p:nvPr/>
         </p:nvSpPr>
         <p:spPr>
           <a:xfrm>
-            <a:off x="777240" y="2514600"/>
-            <a:ext cx="2590723" cy="457200"/>
+            <a:off x="685800" y="2697480"/>
+            <a:ext cx="2636443" cy="457200"/>
           </a:xfrm>
           <a:prstGeom prst="rect">
             <a:avLst/>
@@ -4015,7 +4238,7 @@
             <a:r>
               <a:rPr sz="1600" b="1" i="0">
                 <a:solidFill>
-                  <a:srgbClr val="CEAB1C"/>
+                  <a:srgbClr val="D8C579"/>
                 </a:solidFill>
               </a:rPr>
               <a:t>처음 만난 날</a:t>
@@ -4025,14 +4248,14 @@
       </p:sp>
       <p:sp>
         <p:nvSpPr>
-          <p:cNvPr id="7" name="TextBox 6"/>
+          <p:cNvPr id="9" name="TextBox 8"/>
           <p:cNvSpPr txBox="1"/>
           <p:nvPr/>
         </p:nvSpPr>
         <p:spPr>
           <a:xfrm>
-            <a:off x="822960" y="3703320"/>
-            <a:ext cx="2499283" cy="457200"/>
+            <a:off x="731519" y="3886200"/>
+            <a:ext cx="2545003" cy="457200"/>
           </a:xfrm>
           <a:prstGeom prst="rect">
             <a:avLst/>
@@ -4053,7 +4276,7 @@
             <a:r>
               <a:rPr sz="1800" b="1" i="0">
                 <a:solidFill>
-                  <a:srgbClr val="756110"/>
+                  <a:srgbClr val="494227"/>
                 </a:solidFill>
               </a:rPr>
               <a:t>첫 만남</a:t>
@@ -4063,14 +4286,14 @@
       </p:sp>
       <p:sp>
         <p:nvSpPr>
-          <p:cNvPr id="8" name="TextBox 7"/>
+          <p:cNvPr id="10" name="TextBox 9"/>
           <p:cNvSpPr txBox="1"/>
           <p:nvPr/>
         </p:nvSpPr>
         <p:spPr>
           <a:xfrm>
-            <a:off x="822960" y="4206240"/>
-            <a:ext cx="2499283" cy="1645920"/>
+            <a:off x="731519" y="4389120"/>
+            <a:ext cx="2545003" cy="1645920"/>
           </a:xfrm>
           <a:prstGeom prst="rect">
             <a:avLst/>
@@ -4091,7 +4314,7 @@
             <a:r>
               <a:rPr sz="1500" b="0" i="0">
                 <a:solidFill>
-                  <a:srgbClr val="2B2B2B"/>
+                  <a:srgbClr val="26231F"/>
                 </a:solidFill>
               </a:rPr>
               <a:t>어디에서 어떻게 만났나요?</a:t>
@@ -4101,20 +4324,20 @@
       </p:sp>
       <p:sp>
         <p:nvSpPr>
-          <p:cNvPr id="9" name="때 2"/>
+          <p:cNvPr id="11" name="때 2"/>
           <p:cNvSpPr/>
           <p:nvPr/>
         </p:nvSpPr>
         <p:spPr>
           <a:xfrm>
-            <a:off x="4553597" y="3154680"/>
+            <a:off x="4530737" y="3337560"/>
             <a:ext cx="402336" cy="402336"/>
           </a:xfrm>
           <a:prstGeom prst="ellipse">
             <a:avLst/>
           </a:prstGeom>
           <a:solidFill>
-            <a:srgbClr val="CEAB1C"/>
+            <a:srgbClr val="D8C579"/>
           </a:solidFill>
           <a:ln w="38100">
             <a:solidFill>
@@ -4132,14 +4355,14 @@
       </p:sp>
       <p:sp>
         <p:nvSpPr>
-          <p:cNvPr id="10" name="TextBox 9"/>
+          <p:cNvPr id="12" name="TextBox 11"/>
           <p:cNvSpPr txBox="1"/>
           <p:nvPr/>
         </p:nvSpPr>
         <p:spPr>
           <a:xfrm>
-            <a:off x="3459403" y="2514600"/>
-            <a:ext cx="2590723" cy="457200"/>
+            <a:off x="3413683" y="2697480"/>
+            <a:ext cx="2636443" cy="457200"/>
           </a:xfrm>
           <a:prstGeom prst="rect">
             <a:avLst/>
@@ -4160,7 +4383,7 @@
             <a:r>
               <a:rPr sz="1600" b="1" i="0">
                 <a:solidFill>
-                  <a:srgbClr val="CEAB1C"/>
+                  <a:srgbClr val="D8C579"/>
                 </a:solidFill>
               </a:rPr>
               <a:t>결혼</a:t>
@@ -4170,14 +4393,14 @@
       </p:sp>
       <p:sp>
         <p:nvSpPr>
-          <p:cNvPr id="11" name="TextBox 10"/>
+          <p:cNvPr id="13" name="TextBox 12"/>
           <p:cNvSpPr txBox="1"/>
           <p:nvPr/>
         </p:nvSpPr>
         <p:spPr>
           <a:xfrm>
-            <a:off x="3505123" y="3703320"/>
-            <a:ext cx="2499283" cy="457200"/>
+            <a:off x="3459403" y="3886200"/>
+            <a:ext cx="2545003" cy="457200"/>
           </a:xfrm>
           <a:prstGeom prst="rect">
             <a:avLst/>
@@ -4198,7 +4421,7 @@
             <a:r>
               <a:rPr sz="1800" b="1" i="0">
                 <a:solidFill>
-                  <a:srgbClr val="756110"/>
+                  <a:srgbClr val="494227"/>
                 </a:solidFill>
               </a:rPr>
               <a:t>함께 시작한 날</a:t>
@@ -4208,14 +4431,14 @@
       </p:sp>
       <p:sp>
         <p:nvSpPr>
-          <p:cNvPr id="12" name="TextBox 11"/>
+          <p:cNvPr id="14" name="TextBox 13"/>
           <p:cNvSpPr txBox="1"/>
           <p:nvPr/>
         </p:nvSpPr>
         <p:spPr>
           <a:xfrm>
-            <a:off x="3505123" y="4206240"/>
-            <a:ext cx="2499283" cy="1645920"/>
+            <a:off x="3459403" y="4389120"/>
+            <a:ext cx="2545003" cy="1645920"/>
           </a:xfrm>
           <a:prstGeom prst="rect">
             <a:avLst/>
@@ -4236,7 +4459,7 @@
             <a:r>
               <a:rPr sz="1500" b="0" i="0">
                 <a:solidFill>
-                  <a:srgbClr val="2B2B2B"/>
+                  <a:srgbClr val="26231F"/>
                 </a:solidFill>
               </a:rPr>
               <a:t>그날의 기억을 적어요</a:t>
@@ -4246,20 +4469,20 @@
       </p:sp>
       <p:sp>
         <p:nvSpPr>
-          <p:cNvPr id="13" name="때 3"/>
+          <p:cNvPr id="15" name="때 3"/>
           <p:cNvSpPr/>
           <p:nvPr/>
         </p:nvSpPr>
         <p:spPr>
           <a:xfrm>
-            <a:off x="7235761" y="3154680"/>
+            <a:off x="7258621" y="3337560"/>
             <a:ext cx="402336" cy="402336"/>
           </a:xfrm>
           <a:prstGeom prst="ellipse">
             <a:avLst/>
           </a:prstGeom>
           <a:solidFill>
-            <a:srgbClr val="CEAB1C"/>
+            <a:srgbClr val="D8C579"/>
           </a:solidFill>
           <a:ln w="38100">
             <a:solidFill>
@@ -4277,14 +4500,14 @@
       </p:sp>
       <p:sp>
         <p:nvSpPr>
-          <p:cNvPr id="14" name="TextBox 13"/>
+          <p:cNvPr id="16" name="TextBox 15"/>
           <p:cNvSpPr txBox="1"/>
           <p:nvPr/>
         </p:nvSpPr>
         <p:spPr>
           <a:xfrm>
-            <a:off x="6141567" y="2514600"/>
-            <a:ext cx="2590723" cy="457200"/>
+            <a:off x="6141567" y="2697480"/>
+            <a:ext cx="2636443" cy="457200"/>
           </a:xfrm>
           <a:prstGeom prst="rect">
             <a:avLst/>
@@ -4305,7 +4528,7 @@
             <a:r>
               <a:rPr sz="1600" b="1" i="0">
                 <a:solidFill>
-                  <a:srgbClr val="CEAB1C"/>
+                  <a:srgbClr val="D8C579"/>
                 </a:solidFill>
               </a:rPr>
               <a:t>첫 집</a:t>
@@ -4315,14 +4538,14 @@
       </p:sp>
       <p:sp>
         <p:nvSpPr>
-          <p:cNvPr id="15" name="TextBox 14"/>
+          <p:cNvPr id="17" name="TextBox 16"/>
           <p:cNvSpPr txBox="1"/>
           <p:nvPr/>
         </p:nvSpPr>
         <p:spPr>
           <a:xfrm>
-            <a:off x="6187287" y="3703320"/>
-            <a:ext cx="2499283" cy="457200"/>
+            <a:off x="6187287" y="3886200"/>
+            <a:ext cx="2545003" cy="457200"/>
           </a:xfrm>
           <a:prstGeom prst="rect">
             <a:avLst/>
@@ -4343,7 +4566,7 @@
             <a:r>
               <a:rPr sz="1800" b="1" i="0">
                 <a:solidFill>
-                  <a:srgbClr val="756110"/>
+                  <a:srgbClr val="494227"/>
                 </a:solidFill>
               </a:rPr>
               <a:t>우리의 보금자리</a:t>
@@ -4353,14 +4576,14 @@
       </p:sp>
       <p:sp>
         <p:nvSpPr>
-          <p:cNvPr id="16" name="TextBox 15"/>
+          <p:cNvPr id="18" name="TextBox 17"/>
           <p:cNvSpPr txBox="1"/>
           <p:nvPr/>
         </p:nvSpPr>
         <p:spPr>
           <a:xfrm>
-            <a:off x="6187287" y="4206240"/>
-            <a:ext cx="2499283" cy="1645920"/>
+            <a:off x="6187287" y="4389120"/>
+            <a:ext cx="2545003" cy="1645920"/>
           </a:xfrm>
           <a:prstGeom prst="rect">
             <a:avLst/>
@@ -4381,7 +4604,7 @@
             <a:r>
               <a:rPr sz="1500" b="0" i="0">
                 <a:solidFill>
-                  <a:srgbClr val="2B2B2B"/>
+                  <a:srgbClr val="26231F"/>
                 </a:solidFill>
               </a:rPr>
               <a:t>처음 이사한 날</a:t>
@@ -4391,20 +4614,20 @@
       </p:sp>
       <p:sp>
         <p:nvSpPr>
-          <p:cNvPr id="17" name="때 4"/>
+          <p:cNvPr id="19" name="때 4"/>
           <p:cNvSpPr/>
           <p:nvPr/>
         </p:nvSpPr>
         <p:spPr>
           <a:xfrm>
-            <a:off x="9917925" y="3154680"/>
+            <a:off x="9986505" y="3337560"/>
             <a:ext cx="402336" cy="402336"/>
           </a:xfrm>
           <a:prstGeom prst="ellipse">
             <a:avLst/>
           </a:prstGeom>
           <a:solidFill>
-            <a:srgbClr val="CEAB1C"/>
+            <a:srgbClr val="D8C579"/>
           </a:solidFill>
           <a:ln w="38100">
             <a:solidFill>
@@ -4422,14 +4645,14 @@
       </p:sp>
       <p:sp>
         <p:nvSpPr>
-          <p:cNvPr id="18" name="TextBox 17"/>
+          <p:cNvPr id="20" name="TextBox 19"/>
           <p:cNvSpPr txBox="1"/>
           <p:nvPr/>
         </p:nvSpPr>
         <p:spPr>
           <a:xfrm>
-            <a:off x="8823731" y="2514600"/>
-            <a:ext cx="2590723" cy="457200"/>
+            <a:off x="8869451" y="2697480"/>
+            <a:ext cx="2636443" cy="457200"/>
           </a:xfrm>
           <a:prstGeom prst="rect">
             <a:avLst/>
@@ -4450,7 +4673,7 @@
             <a:r>
               <a:rPr sz="1600" b="1" i="0">
                 <a:solidFill>
-                  <a:srgbClr val="CEAB1C"/>
+                  <a:srgbClr val="D8C579"/>
                 </a:solidFill>
               </a:rPr>
               <a:t>지금</a:t>
@@ -4460,14 +4683,14 @@
       </p:sp>
       <p:sp>
         <p:nvSpPr>
-          <p:cNvPr id="19" name="TextBox 18"/>
+          <p:cNvPr id="21" name="TextBox 20"/>
           <p:cNvSpPr txBox="1"/>
           <p:nvPr/>
         </p:nvSpPr>
         <p:spPr>
           <a:xfrm>
-            <a:off x="8869451" y="3703320"/>
-            <a:ext cx="2499283" cy="457200"/>
+            <a:off x="8915171" y="3886200"/>
+            <a:ext cx="2545003" cy="457200"/>
           </a:xfrm>
           <a:prstGeom prst="rect">
             <a:avLst/>
@@ -4488,7 +4711,7 @@
             <a:r>
               <a:rPr sz="1800" b="1" i="0">
                 <a:solidFill>
-                  <a:srgbClr val="756110"/>
+                  <a:srgbClr val="494227"/>
                 </a:solidFill>
               </a:rPr>
               <a:t>오늘의 우리</a:t>
@@ -4498,14 +4721,14 @@
       </p:sp>
       <p:sp>
         <p:nvSpPr>
-          <p:cNvPr id="20" name="TextBox 19"/>
+          <p:cNvPr id="22" name="TextBox 21"/>
           <p:cNvSpPr txBox="1"/>
           <p:nvPr/>
         </p:nvSpPr>
         <p:spPr>
           <a:xfrm>
-            <a:off x="8869451" y="4206240"/>
-            <a:ext cx="2499283" cy="1645920"/>
+            <a:off x="8915171" y="4389120"/>
+            <a:ext cx="2545003" cy="1645920"/>
           </a:xfrm>
           <a:prstGeom prst="rect">
             <a:avLst/>
@@ -4526,7 +4749,7 @@
             <a:r>
               <a:rPr sz="1500" b="0" i="0">
                 <a:solidFill>
-                  <a:srgbClr val="2B2B2B"/>
+                  <a:srgbClr val="26231F"/>
                 </a:solidFill>
               </a:rPr>
               <a:t>요즘 우리 이야기</a:t>
@@ -4548,7 +4771,7 @@
     <p:bg>
       <p:bgPr>
         <a:solidFill>
-          <a:srgbClr val="CEAB1C"/>
+          <a:srgbClr val="F6EFD5"/>
         </a:solidFill>
         <a:effectLst/>
       </p:bgPr>
@@ -4568,13 +4791,78 @@
         </p:nvSpPr>
         <p:spPr>
           <a:xfrm>
-            <a:off x="274320" y="274320"/>
-            <a:ext cx="11643055" cy="6309360"/>
-          </a:xfrm>
-          <a:prstGeom prst="roundRect">
-            <a:avLst>
-              <a:gd name="adj" fmla="val 3500"/>
-            </a:avLst>
+            <a:off x="10180015" y="-1645920"/>
+            <a:ext cx="3474720" cy="3474720"/>
+          </a:xfrm>
+          <a:prstGeom prst="ellipse">
+            <a:avLst/>
+          </a:prstGeom>
+          <a:solidFill>
+            <a:srgbClr val="EBDEAD"/>
+          </a:solidFill>
+          <a:ln>
+            <a:noFill/>
+          </a:ln>
+        </p:spPr>
+        <p:txBody>
+          <a:bodyPr rtlCol="0" anchor="ctr"/>
+          <a:lstStyle/>
+          <a:p>
+            <a:pPr algn="ctr"/>
+          </a:p>
+        </p:txBody>
+      </p:sp>
+      <p:sp>
+        <p:nvSpPr>
+          <p:cNvPr id="4" name="상단 라벨"/>
+          <p:cNvSpPr txBox="1"/>
+          <p:nvPr/>
+        </p:nvSpPr>
+        <p:spPr>
+          <a:xfrm>
+            <a:off x="640080" y="274320"/>
+            <a:ext cx="5486400" cy="274320"/>
+          </a:xfrm>
+          <a:prstGeom prst="rect">
+            <a:avLst/>
+          </a:prstGeom>
+          <a:noFill/>
+        </p:spPr>
+        <p:txBody>
+          <a:bodyPr wrap="square" lIns="54864" rIns="54864" tIns="27432" bIns="27432" anchor="ctr">
+            <a:noAutofit/>
+          </a:bodyPr>
+          <a:lstStyle/>
+          <a:p>
+            <a:pPr algn="l">
+              <a:lnSpc>
+                <a:spcPct val="115000"/>
+              </a:lnSpc>
+            </a:pPr>
+            <a:r>
+              <a:rPr sz="900" b="1" i="0" spc="250">
+                <a:solidFill>
+                  <a:srgbClr val="26231F"/>
+                </a:solidFill>
+              </a:rPr>
+              <a:t>FAMILY ALBUM</a:t>
+            </a:r>
+          </a:p>
+        </p:txBody>
+      </p:sp>
+      <p:sp>
+        <p:nvSpPr>
+          <p:cNvPr id="5" name="포인트"/>
+          <p:cNvSpPr/>
+          <p:nvPr/>
+        </p:nvSpPr>
+        <p:spPr>
+          <a:xfrm>
+            <a:off x="11048695" y="502919"/>
+            <a:ext cx="274320" cy="274320"/>
+          </a:xfrm>
+          <a:prstGeom prst="moon">
+            <a:avLst/>
           </a:prstGeom>
           <a:solidFill>
             <a:srgbClr val="FFFFFF"/>
@@ -4603,8 +4891,8 @@
         </p:nvSpPr>
         <p:spPr>
           <a:xfrm>
-            <a:off x="731520" y="548640"/>
-            <a:ext cx="9448495" cy="868680"/>
+            <a:off x="640080" y="658368"/>
+            <a:ext cx="9082735" cy="868680"/>
           </a:xfrm>
         </p:spPr>
         <p:txBody>
@@ -4621,7 +4909,7 @@
             <a:r>
               <a:rPr sz="3000" b="1" i="0">
                 <a:solidFill>
-                  <a:srgbClr val="756110"/>
+                  <a:srgbClr val="26231F"/>
                 </a:solidFill>
               </a:rPr>
               <a:t>우리 가족의 약속</a:t>
@@ -4631,26 +4919,26 @@
       </p:sp>
       <p:sp>
         <p:nvSpPr>
-          <p:cNvPr id="4" name="줄 1"/>
+          <p:cNvPr id="6" name="줄 1"/>
           <p:cNvSpPr/>
           <p:nvPr/>
         </p:nvSpPr>
         <p:spPr>
           <a:xfrm>
-            <a:off x="731520" y="1600200"/>
-            <a:ext cx="10728655" cy="1005840"/>
+            <a:off x="640080" y="1783080"/>
+            <a:ext cx="10911535" cy="1005840"/>
           </a:xfrm>
           <a:prstGeom prst="roundRect">
             <a:avLst>
-              <a:gd name="adj" fmla="val 8000"/>
+              <a:gd name="adj" fmla="val 3000"/>
             </a:avLst>
           </a:prstGeom>
           <a:solidFill>
-            <a:srgbClr val="FDF9ED"/>
+            <a:srgbClr val="FFFFFF"/>
           </a:solidFill>
-          <a:ln w="12700">
+          <a:ln w="9525">
             <a:solidFill>
-              <a:srgbClr val="F9EFC8"/>
+              <a:srgbClr val="F6EFD5"/>
             </a:solidFill>
           </a:ln>
         </p:spPr>
@@ -4664,20 +4952,49 @@
       </p:sp>
       <p:sp>
         <p:nvSpPr>
-          <p:cNvPr id="5" name="번호 1"/>
+          <p:cNvPr id="7" name="위쪽 띠"/>
           <p:cNvSpPr/>
           <p:nvPr/>
         </p:nvSpPr>
         <p:spPr>
           <a:xfrm>
-            <a:off x="914400" y="1874519"/>
+            <a:off x="649224" y="1792224"/>
+            <a:ext cx="10893247" cy="82296"/>
+          </a:xfrm>
+          <a:prstGeom prst="rect">
+            <a:avLst/>
+          </a:prstGeom>
+          <a:solidFill>
+            <a:srgbClr val="D8C579"/>
+          </a:solidFill>
+          <a:ln>
+            <a:noFill/>
+          </a:ln>
+        </p:spPr>
+        <p:txBody>
+          <a:bodyPr rtlCol="0" anchor="ctr"/>
+          <a:lstStyle/>
+          <a:p>
+            <a:pPr algn="ctr"/>
+          </a:p>
+        </p:txBody>
+      </p:sp>
+      <p:sp>
+        <p:nvSpPr>
+          <p:cNvPr id="8" name="번호 1"/>
+          <p:cNvSpPr/>
+          <p:nvPr/>
+        </p:nvSpPr>
+        <p:spPr>
+          <a:xfrm>
+            <a:off x="822959" y="2057400"/>
             <a:ext cx="457200" cy="457200"/>
           </a:xfrm>
           <a:prstGeom prst="ellipse">
             <a:avLst/>
           </a:prstGeom>
           <a:solidFill>
-            <a:srgbClr val="CEAB1C"/>
+            <a:srgbClr val="CEE198"/>
           </a:solidFill>
           <a:ln>
             <a:noFill/>
@@ -4697,7 +5014,7 @@
             <a:r>
               <a:rPr sz="1600" b="1" i="0">
                 <a:solidFill>
-                  <a:srgbClr val="FFFFFF"/>
+                  <a:srgbClr val="26231F"/>
                 </a:solidFill>
               </a:rPr>
               <a:t>1</a:t>
@@ -4707,13 +5024,13 @@
       </p:sp>
       <p:sp>
         <p:nvSpPr>
-          <p:cNvPr id="6" name="TextBox 5"/>
+          <p:cNvPr id="9" name="TextBox 8"/>
           <p:cNvSpPr txBox="1"/>
           <p:nvPr/>
         </p:nvSpPr>
         <p:spPr>
           <a:xfrm>
-            <a:off x="1600200" y="1645920"/>
+            <a:off x="1508760" y="1828800"/>
             <a:ext cx="2743200" cy="914400"/>
           </a:xfrm>
           <a:prstGeom prst="rect">
@@ -4735,7 +5052,7 @@
             <a:r>
               <a:rPr sz="1800" b="1" i="0">
                 <a:solidFill>
-                  <a:srgbClr val="756110"/>
+                  <a:srgbClr val="494227"/>
                 </a:solidFill>
               </a:rPr>
               <a:t>약속 1</a:t>
@@ -4745,14 +5062,14 @@
       </p:sp>
       <p:sp>
         <p:nvSpPr>
-          <p:cNvPr id="7" name="TextBox 6"/>
+          <p:cNvPr id="10" name="TextBox 9"/>
           <p:cNvSpPr txBox="1"/>
           <p:nvPr/>
         </p:nvSpPr>
         <p:spPr>
           <a:xfrm>
-            <a:off x="4389120" y="1645920"/>
-            <a:ext cx="6888175" cy="914400"/>
+            <a:off x="4297680" y="1828800"/>
+            <a:ext cx="7071055" cy="914400"/>
           </a:xfrm>
           <a:prstGeom prst="rect">
             <a:avLst/>
@@ -4773,7 +5090,7 @@
             <a:r>
               <a:rPr sz="1700" b="0" i="0">
                 <a:solidFill>
-                  <a:srgbClr val="2B2B2B"/>
+                  <a:srgbClr val="26231F"/>
                 </a:solidFill>
               </a:rPr>
               <a:t>하루에 한 번 서로 안아 주기</a:t>
@@ -4783,26 +5100,26 @@
       </p:sp>
       <p:sp>
         <p:nvSpPr>
-          <p:cNvPr id="8" name="줄 2"/>
+          <p:cNvPr id="11" name="줄 2"/>
           <p:cNvSpPr/>
           <p:nvPr/>
         </p:nvSpPr>
         <p:spPr>
           <a:xfrm>
-            <a:off x="731520" y="2743200"/>
-            <a:ext cx="10728655" cy="1005840"/>
+            <a:off x="640080" y="2926080"/>
+            <a:ext cx="10911535" cy="1005840"/>
           </a:xfrm>
           <a:prstGeom prst="roundRect">
             <a:avLst>
-              <a:gd name="adj" fmla="val 8000"/>
+              <a:gd name="adj" fmla="val 3000"/>
             </a:avLst>
           </a:prstGeom>
           <a:solidFill>
-            <a:srgbClr val="FDF9ED"/>
+            <a:srgbClr val="FFFFFF"/>
           </a:solidFill>
-          <a:ln w="12700">
+          <a:ln w="9525">
             <a:solidFill>
-              <a:srgbClr val="F9EFC8"/>
+              <a:srgbClr val="F6EFD5"/>
             </a:solidFill>
           </a:ln>
         </p:spPr>
@@ -4816,20 +5133,49 @@
       </p:sp>
       <p:sp>
         <p:nvSpPr>
-          <p:cNvPr id="9" name="번호 2"/>
+          <p:cNvPr id="12" name="위쪽 띠"/>
           <p:cNvSpPr/>
           <p:nvPr/>
         </p:nvSpPr>
         <p:spPr>
           <a:xfrm>
-            <a:off x="914400" y="3017520"/>
+            <a:off x="649224" y="2935224"/>
+            <a:ext cx="10893247" cy="82296"/>
+          </a:xfrm>
+          <a:prstGeom prst="rect">
+            <a:avLst/>
+          </a:prstGeom>
+          <a:solidFill>
+            <a:srgbClr val="D8C579"/>
+          </a:solidFill>
+          <a:ln>
+            <a:noFill/>
+          </a:ln>
+        </p:spPr>
+        <p:txBody>
+          <a:bodyPr rtlCol="0" anchor="ctr"/>
+          <a:lstStyle/>
+          <a:p>
+            <a:pPr algn="ctr"/>
+          </a:p>
+        </p:txBody>
+      </p:sp>
+      <p:sp>
+        <p:nvSpPr>
+          <p:cNvPr id="13" name="번호 2"/>
+          <p:cNvSpPr/>
+          <p:nvPr/>
+        </p:nvSpPr>
+        <p:spPr>
+          <a:xfrm>
+            <a:off x="822959" y="3200400"/>
             <a:ext cx="457200" cy="457200"/>
           </a:xfrm>
           <a:prstGeom prst="ellipse">
             <a:avLst/>
           </a:prstGeom>
           <a:solidFill>
-            <a:srgbClr val="CEAB1C"/>
+            <a:srgbClr val="CEE198"/>
           </a:solidFill>
           <a:ln>
             <a:noFill/>
@@ -4849,7 +5195,7 @@
             <a:r>
               <a:rPr sz="1600" b="1" i="0">
                 <a:solidFill>
-                  <a:srgbClr val="FFFFFF"/>
+                  <a:srgbClr val="26231F"/>
                 </a:solidFill>
               </a:rPr>
               <a:t>2</a:t>
@@ -4859,13 +5205,13 @@
       </p:sp>
       <p:sp>
         <p:nvSpPr>
-          <p:cNvPr id="10" name="TextBox 9"/>
+          <p:cNvPr id="14" name="TextBox 13"/>
           <p:cNvSpPr txBox="1"/>
           <p:nvPr/>
         </p:nvSpPr>
         <p:spPr>
           <a:xfrm>
-            <a:off x="1600200" y="2788920"/>
+            <a:off x="1508760" y="2971800"/>
             <a:ext cx="2743200" cy="914400"/>
           </a:xfrm>
           <a:prstGeom prst="rect">
@@ -4887,7 +5233,7 @@
             <a:r>
               <a:rPr sz="1800" b="1" i="0">
                 <a:solidFill>
-                  <a:srgbClr val="756110"/>
+                  <a:srgbClr val="494227"/>
                 </a:solidFill>
               </a:rPr>
               <a:t>약속 2</a:t>
@@ -4897,14 +5243,14 @@
       </p:sp>
       <p:sp>
         <p:nvSpPr>
-          <p:cNvPr id="11" name="TextBox 10"/>
+          <p:cNvPr id="15" name="TextBox 14"/>
           <p:cNvSpPr txBox="1"/>
           <p:nvPr/>
         </p:nvSpPr>
         <p:spPr>
           <a:xfrm>
-            <a:off x="4389120" y="2788920"/>
-            <a:ext cx="6888175" cy="914400"/>
+            <a:off x="4297680" y="2971800"/>
+            <a:ext cx="7071055" cy="914400"/>
           </a:xfrm>
           <a:prstGeom prst="rect">
             <a:avLst/>
@@ -4925,7 +5271,7 @@
             <a:r>
               <a:rPr sz="1700" b="0" i="0">
                 <a:solidFill>
-                  <a:srgbClr val="2B2B2B"/>
+                  <a:srgbClr val="26231F"/>
                 </a:solidFill>
               </a:rPr>
               <a:t>화가 나도 잠자리 전엔 풀기</a:t>
@@ -4935,26 +5281,26 @@
       </p:sp>
       <p:sp>
         <p:nvSpPr>
-          <p:cNvPr id="12" name="줄 3"/>
+          <p:cNvPr id="16" name="줄 3"/>
           <p:cNvSpPr/>
           <p:nvPr/>
         </p:nvSpPr>
         <p:spPr>
           <a:xfrm>
-            <a:off x="731520" y="3886200"/>
-            <a:ext cx="10728655" cy="1005840"/>
+            <a:off x="640080" y="4069080"/>
+            <a:ext cx="10911535" cy="1005840"/>
           </a:xfrm>
           <a:prstGeom prst="roundRect">
             <a:avLst>
-              <a:gd name="adj" fmla="val 8000"/>
+              <a:gd name="adj" fmla="val 3000"/>
             </a:avLst>
           </a:prstGeom>
           <a:solidFill>
-            <a:srgbClr val="FDF9ED"/>
+            <a:srgbClr val="FFFFFF"/>
           </a:solidFill>
-          <a:ln w="12700">
+          <a:ln w="9525">
             <a:solidFill>
-              <a:srgbClr val="F9EFC8"/>
+              <a:srgbClr val="F6EFD5"/>
             </a:solidFill>
           </a:ln>
         </p:spPr>
@@ -4968,20 +5314,49 @@
       </p:sp>
       <p:sp>
         <p:nvSpPr>
-          <p:cNvPr id="13" name="번호 3"/>
+          <p:cNvPr id="17" name="위쪽 띠"/>
           <p:cNvSpPr/>
           <p:nvPr/>
         </p:nvSpPr>
         <p:spPr>
           <a:xfrm>
-            <a:off x="914400" y="4160520"/>
+            <a:off x="649224" y="4078224"/>
+            <a:ext cx="10893247" cy="82296"/>
+          </a:xfrm>
+          <a:prstGeom prst="rect">
+            <a:avLst/>
+          </a:prstGeom>
+          <a:solidFill>
+            <a:srgbClr val="D8C579"/>
+          </a:solidFill>
+          <a:ln>
+            <a:noFill/>
+          </a:ln>
+        </p:spPr>
+        <p:txBody>
+          <a:bodyPr rtlCol="0" anchor="ctr"/>
+          <a:lstStyle/>
+          <a:p>
+            <a:pPr algn="ctr"/>
+          </a:p>
+        </p:txBody>
+      </p:sp>
+      <p:sp>
+        <p:nvSpPr>
+          <p:cNvPr id="18" name="번호 3"/>
+          <p:cNvSpPr/>
+          <p:nvPr/>
+        </p:nvSpPr>
+        <p:spPr>
+          <a:xfrm>
+            <a:off x="822959" y="4343400"/>
             <a:ext cx="457200" cy="457200"/>
           </a:xfrm>
           <a:prstGeom prst="ellipse">
             <a:avLst/>
           </a:prstGeom>
           <a:solidFill>
-            <a:srgbClr val="CEAB1C"/>
+            <a:srgbClr val="CEE198"/>
           </a:solidFill>
           <a:ln>
             <a:noFill/>
@@ -5001,7 +5376,7 @@
             <a:r>
               <a:rPr sz="1600" b="1" i="0">
                 <a:solidFill>
-                  <a:srgbClr val="FFFFFF"/>
+                  <a:srgbClr val="26231F"/>
                 </a:solidFill>
               </a:rPr>
               <a:t>3</a:t>
@@ -5011,13 +5386,13 @@
       </p:sp>
       <p:sp>
         <p:nvSpPr>
-          <p:cNvPr id="14" name="TextBox 13"/>
+          <p:cNvPr id="19" name="TextBox 18"/>
           <p:cNvSpPr txBox="1"/>
           <p:nvPr/>
         </p:nvSpPr>
         <p:spPr>
           <a:xfrm>
-            <a:off x="1600200" y="3931920"/>
+            <a:off x="1508760" y="4114800"/>
             <a:ext cx="2743200" cy="914400"/>
           </a:xfrm>
           <a:prstGeom prst="rect">
@@ -5039,7 +5414,7 @@
             <a:r>
               <a:rPr sz="1800" b="1" i="0">
                 <a:solidFill>
-                  <a:srgbClr val="756110"/>
+                  <a:srgbClr val="494227"/>
                 </a:solidFill>
               </a:rPr>
               <a:t>약속 3</a:t>
@@ -5049,14 +5424,14 @@
       </p:sp>
       <p:sp>
         <p:nvSpPr>
-          <p:cNvPr id="15" name="TextBox 14"/>
+          <p:cNvPr id="20" name="TextBox 19"/>
           <p:cNvSpPr txBox="1"/>
           <p:nvPr/>
         </p:nvSpPr>
         <p:spPr>
           <a:xfrm>
-            <a:off x="4389120" y="3931920"/>
-            <a:ext cx="6888175" cy="914400"/>
+            <a:off x="4297680" y="4114800"/>
+            <a:ext cx="7071055" cy="914400"/>
           </a:xfrm>
           <a:prstGeom prst="rect">
             <a:avLst/>
@@ -5077,7 +5452,7 @@
             <a:r>
               <a:rPr sz="1700" b="0" i="0">
                 <a:solidFill>
-                  <a:srgbClr val="2B2B2B"/>
+                  <a:srgbClr val="26231F"/>
                 </a:solidFill>
               </a:rPr>
               <a:t>한 달에 한 번 데이트하기</a:t>
@@ -5099,7 +5474,7 @@
     <p:bg>
       <p:bgPr>
         <a:solidFill>
-          <a:srgbClr val="CEAB1C"/>
+          <a:srgbClr val="F6EFD5"/>
         </a:solidFill>
         <a:effectLst/>
       </p:bgPr>
@@ -5119,13 +5494,78 @@
         </p:nvSpPr>
         <p:spPr>
           <a:xfrm>
-            <a:off x="274320" y="274320"/>
-            <a:ext cx="11643055" cy="6309360"/>
-          </a:xfrm>
-          <a:prstGeom prst="roundRect">
-            <a:avLst>
-              <a:gd name="adj" fmla="val 3500"/>
-            </a:avLst>
+            <a:off x="10180015" y="-1645920"/>
+            <a:ext cx="3474720" cy="3474720"/>
+          </a:xfrm>
+          <a:prstGeom prst="ellipse">
+            <a:avLst/>
+          </a:prstGeom>
+          <a:solidFill>
+            <a:srgbClr val="EBDEAD"/>
+          </a:solidFill>
+          <a:ln>
+            <a:noFill/>
+          </a:ln>
+        </p:spPr>
+        <p:txBody>
+          <a:bodyPr rtlCol="0" anchor="ctr"/>
+          <a:lstStyle/>
+          <a:p>
+            <a:pPr algn="ctr"/>
+          </a:p>
+        </p:txBody>
+      </p:sp>
+      <p:sp>
+        <p:nvSpPr>
+          <p:cNvPr id="4" name="상단 라벨"/>
+          <p:cNvSpPr txBox="1"/>
+          <p:nvPr/>
+        </p:nvSpPr>
+        <p:spPr>
+          <a:xfrm>
+            <a:off x="640080" y="274320"/>
+            <a:ext cx="5486400" cy="274320"/>
+          </a:xfrm>
+          <a:prstGeom prst="rect">
+            <a:avLst/>
+          </a:prstGeom>
+          <a:noFill/>
+        </p:spPr>
+        <p:txBody>
+          <a:bodyPr wrap="square" lIns="54864" rIns="54864" tIns="27432" bIns="27432" anchor="ctr">
+            <a:noAutofit/>
+          </a:bodyPr>
+          <a:lstStyle/>
+          <a:p>
+            <a:pPr algn="l">
+              <a:lnSpc>
+                <a:spcPct val="115000"/>
+              </a:lnSpc>
+            </a:pPr>
+            <a:r>
+              <a:rPr sz="900" b="1" i="0" spc="250">
+                <a:solidFill>
+                  <a:srgbClr val="26231F"/>
+                </a:solidFill>
+              </a:rPr>
+              <a:t>FAMILY ALBUM</a:t>
+            </a:r>
+          </a:p>
+        </p:txBody>
+      </p:sp>
+      <p:sp>
+        <p:nvSpPr>
+          <p:cNvPr id="5" name="포인트"/>
+          <p:cNvSpPr/>
+          <p:nvPr/>
+        </p:nvSpPr>
+        <p:spPr>
+          <a:xfrm>
+            <a:off x="11048695" y="502919"/>
+            <a:ext cx="274320" cy="274320"/>
+          </a:xfrm>
+          <a:prstGeom prst="moon">
+            <a:avLst/>
           </a:prstGeom>
           <a:solidFill>
             <a:srgbClr val="FFFFFF"/>
@@ -5154,8 +5594,8 @@
         </p:nvSpPr>
         <p:spPr>
           <a:xfrm>
-            <a:off x="731520" y="548640"/>
-            <a:ext cx="9448495" cy="868680"/>
+            <a:off x="640080" y="658368"/>
+            <a:ext cx="9082735" cy="868680"/>
           </a:xfrm>
         </p:spPr>
         <p:txBody>
@@ -5172,7 +5612,7 @@
             <a:r>
               <a:rPr sz="3000" b="1" i="0">
                 <a:solidFill>
-                  <a:srgbClr val="756110"/>
+                  <a:srgbClr val="26231F"/>
                 </a:solidFill>
               </a:rPr>
               <a:t>가족 사진</a:t>
@@ -5182,14 +5622,14 @@
       </p:sp>
       <p:sp>
         <p:nvSpPr>
-          <p:cNvPr id="4" name="사진 자리"/>
+          <p:cNvPr id="6" name="사진 자리"/>
           <p:cNvSpPr/>
           <p:nvPr/>
         </p:nvSpPr>
         <p:spPr>
           <a:xfrm>
-            <a:off x="731520" y="1600200"/>
-            <a:ext cx="3454298" cy="2217420"/>
+            <a:off x="640080" y="1783080"/>
+            <a:ext cx="3515258" cy="2194560"/>
           </a:xfrm>
           <a:prstGeom prst="roundRect">
             <a:avLst>
@@ -5197,12 +5637,10 @@
             </a:avLst>
           </a:prstGeom>
           <a:solidFill>
-            <a:srgbClr val="F9EFC8"/>
+            <a:srgbClr val="F6EFD5"/>
           </a:solidFill>
           <a:ln w="19050">
-            <a:solidFill>
-              <a:srgbClr val="CEAB1C"/>
-            </a:solidFill>
+            <a:noFill/>
             <a:prstDash val="dash"/>
           </a:ln>
         </p:spPr>
@@ -5220,7 +5658,7 @@
             <a:r>
               <a:rPr sz="1200" b="0" i="0">
                 <a:solidFill>
-                  <a:srgbClr val="756110"/>
+                  <a:srgbClr val="8E8780"/>
                 </a:solidFill>
               </a:rPr>
               <a:t>사진 1</a:t>
@@ -5230,14 +5668,14 @@
       </p:sp>
       <p:sp>
         <p:nvSpPr>
-          <p:cNvPr id="5" name="사진 자리"/>
+          <p:cNvPr id="7" name="사진 자리"/>
           <p:cNvSpPr/>
           <p:nvPr/>
         </p:nvSpPr>
         <p:spPr>
           <a:xfrm>
-            <a:off x="4368698" y="1600200"/>
-            <a:ext cx="3454298" cy="2217420"/>
+            <a:off x="4338218" y="1783080"/>
+            <a:ext cx="3515258" cy="2194560"/>
           </a:xfrm>
           <a:prstGeom prst="roundRect">
             <a:avLst>
@@ -5245,12 +5683,10 @@
             </a:avLst>
           </a:prstGeom>
           <a:solidFill>
-            <a:srgbClr val="F9EFC8"/>
+            <a:srgbClr val="F6EFD5"/>
           </a:solidFill>
           <a:ln w="19050">
-            <a:solidFill>
-              <a:srgbClr val="CEAB1C"/>
-            </a:solidFill>
+            <a:noFill/>
             <a:prstDash val="dash"/>
           </a:ln>
         </p:spPr>
@@ -5268,7 +5704,7 @@
             <a:r>
               <a:rPr sz="1200" b="0" i="0">
                 <a:solidFill>
-                  <a:srgbClr val="756110"/>
+                  <a:srgbClr val="8E8780"/>
                 </a:solidFill>
               </a:rPr>
               <a:t>사진 2</a:t>
@@ -5278,14 +5714,14 @@
       </p:sp>
       <p:sp>
         <p:nvSpPr>
-          <p:cNvPr id="6" name="사진 자리"/>
+          <p:cNvPr id="8" name="사진 자리"/>
           <p:cNvSpPr/>
           <p:nvPr/>
         </p:nvSpPr>
         <p:spPr>
           <a:xfrm>
-            <a:off x="8005876" y="1600200"/>
-            <a:ext cx="3454298" cy="2217420"/>
+            <a:off x="8036356" y="1783080"/>
+            <a:ext cx="3515258" cy="2194560"/>
           </a:xfrm>
           <a:prstGeom prst="roundRect">
             <a:avLst>
@@ -5293,12 +5729,10 @@
             </a:avLst>
           </a:prstGeom>
           <a:solidFill>
-            <a:srgbClr val="F9EFC8"/>
+            <a:srgbClr val="F6EFD5"/>
           </a:solidFill>
           <a:ln w="19050">
-            <a:solidFill>
-              <a:srgbClr val="CEAB1C"/>
-            </a:solidFill>
+            <a:noFill/>
             <a:prstDash val="dash"/>
           </a:ln>
         </p:spPr>
@@ -5316,7 +5750,7 @@
             <a:r>
               <a:rPr sz="1200" b="0" i="0">
                 <a:solidFill>
-                  <a:srgbClr val="756110"/>
+                  <a:srgbClr val="8E8780"/>
                 </a:solidFill>
               </a:rPr>
               <a:t>사진 3</a:t>
@@ -5326,14 +5760,14 @@
       </p:sp>
       <p:sp>
         <p:nvSpPr>
-          <p:cNvPr id="7" name="사진 자리"/>
+          <p:cNvPr id="9" name="사진 자리"/>
           <p:cNvSpPr/>
           <p:nvPr/>
         </p:nvSpPr>
         <p:spPr>
           <a:xfrm>
-            <a:off x="731520" y="4000500"/>
-            <a:ext cx="3454298" cy="2217420"/>
+            <a:off x="640080" y="4160520"/>
+            <a:ext cx="3515258" cy="2194560"/>
           </a:xfrm>
           <a:prstGeom prst="roundRect">
             <a:avLst>
@@ -5341,12 +5775,10 @@
             </a:avLst>
           </a:prstGeom>
           <a:solidFill>
-            <a:srgbClr val="F9EFC8"/>
+            <a:srgbClr val="F6EFD5"/>
           </a:solidFill>
           <a:ln w="19050">
-            <a:solidFill>
-              <a:srgbClr val="CEAB1C"/>
-            </a:solidFill>
+            <a:noFill/>
             <a:prstDash val="dash"/>
           </a:ln>
         </p:spPr>
@@ -5364,7 +5796,7 @@
             <a:r>
               <a:rPr sz="1200" b="0" i="0">
                 <a:solidFill>
-                  <a:srgbClr val="756110"/>
+                  <a:srgbClr val="8E8780"/>
                 </a:solidFill>
               </a:rPr>
               <a:t>사진 4</a:t>
@@ -5374,14 +5806,14 @@
       </p:sp>
       <p:sp>
         <p:nvSpPr>
-          <p:cNvPr id="8" name="사진 자리"/>
+          <p:cNvPr id="10" name="사진 자리"/>
           <p:cNvSpPr/>
           <p:nvPr/>
         </p:nvSpPr>
         <p:spPr>
           <a:xfrm>
-            <a:off x="4368698" y="4000500"/>
-            <a:ext cx="3454298" cy="2217420"/>
+            <a:off x="4338218" y="4160520"/>
+            <a:ext cx="3515258" cy="2194560"/>
           </a:xfrm>
           <a:prstGeom prst="roundRect">
             <a:avLst>
@@ -5389,12 +5821,10 @@
             </a:avLst>
           </a:prstGeom>
           <a:solidFill>
-            <a:srgbClr val="F9EFC8"/>
+            <a:srgbClr val="F6EFD5"/>
           </a:solidFill>
           <a:ln w="19050">
-            <a:solidFill>
-              <a:srgbClr val="CEAB1C"/>
-            </a:solidFill>
+            <a:noFill/>
             <a:prstDash val="dash"/>
           </a:ln>
         </p:spPr>
@@ -5412,7 +5842,7 @@
             <a:r>
               <a:rPr sz="1200" b="0" i="0">
                 <a:solidFill>
-                  <a:srgbClr val="756110"/>
+                  <a:srgbClr val="8E8780"/>
                 </a:solidFill>
               </a:rPr>
               <a:t>사진 5</a:t>
@@ -5422,14 +5852,14 @@
       </p:sp>
       <p:sp>
         <p:nvSpPr>
-          <p:cNvPr id="9" name="사진 자리"/>
+          <p:cNvPr id="11" name="사진 자리"/>
           <p:cNvSpPr/>
           <p:nvPr/>
         </p:nvSpPr>
         <p:spPr>
           <a:xfrm>
-            <a:off x="8005876" y="4000500"/>
-            <a:ext cx="3454298" cy="2217420"/>
+            <a:off x="8036356" y="4160520"/>
+            <a:ext cx="3515258" cy="2194560"/>
           </a:xfrm>
           <a:prstGeom prst="roundRect">
             <a:avLst>
@@ -5437,12 +5867,10 @@
             </a:avLst>
           </a:prstGeom>
           <a:solidFill>
-            <a:srgbClr val="F9EFC8"/>
+            <a:srgbClr val="F6EFD5"/>
           </a:solidFill>
           <a:ln w="19050">
-            <a:solidFill>
-              <a:srgbClr val="CEAB1C"/>
-            </a:solidFill>
+            <a:noFill/>
             <a:prstDash val="dash"/>
           </a:ln>
         </p:spPr>
@@ -5460,7 +5888,7 @@
             <a:r>
               <a:rPr sz="1200" b="0" i="0">
                 <a:solidFill>
-                  <a:srgbClr val="756110"/>
+                  <a:srgbClr val="8E8780"/>
                 </a:solidFill>
               </a:rPr>
               <a:t>사진 6</a:t>
@@ -5479,6 +5907,14 @@
 <file path=ppt/slides/slide6.xml><?xml version="1.0" encoding="utf-8"?>
 <p:sld xmlns:a="http://schemas.openxmlformats.org/drawingml/2006/main" xmlns:p="http://schemas.openxmlformats.org/presentationml/2006/main" xmlns:r="http://schemas.openxmlformats.org/officeDocument/2006/relationships">
   <p:cSld>
+    <p:bg>
+      <p:bgPr>
+        <a:solidFill>
+          <a:srgbClr val="FBF8EC"/>
+        </a:solidFill>
+        <a:effectLst/>
+      </p:bgPr>
+    </p:bg>
     <p:spTree>
       <p:nvGrpSpPr>
         <p:cNvPr id="1" name=""/>
@@ -5486,30 +5922,119 @@
         <p:nvPr/>
       </p:nvGrpSpPr>
       <p:grpSpPr/>
-      <p:pic>
-        <p:nvPicPr>
-          <p:cNvPr id="3" name="표지 그림" descr="family-31.jpg"/>
-          <p:cNvPicPr>
-            <a:picLocks noChangeAspect="1"/>
-          </p:cNvPicPr>
-          <p:nvPr/>
-        </p:nvPicPr>
-        <p:blipFill>
-          <a:blip r:embed="rId2"/>
-          <a:stretch>
-            <a:fillRect/>
-          </a:stretch>
-        </p:blipFill>
-        <p:spPr>
-          <a:xfrm>
-            <a:off x="0" y="0"/>
-            <a:ext cx="12191695" cy="6858000"/>
+      <p:sp>
+        <p:nvSpPr>
+          <p:cNvPr id="3" name="사진 자리"/>
+          <p:cNvSpPr/>
+          <p:nvPr/>
+        </p:nvSpPr>
+        <p:spPr>
+          <a:xfrm>
+            <a:off x="1463003" y="685800"/>
+            <a:ext cx="3169840" cy="5486400"/>
+          </a:xfrm>
+          <a:prstGeom prst="round2SameRect">
+            <a:avLst>
+              <a:gd name="adj1" fmla="val 50000"/>
+              <a:gd name="adj2" fmla="val 0"/>
+            </a:avLst>
+          </a:prstGeom>
+          <a:solidFill>
+            <a:srgbClr val="EBDEAD"/>
+          </a:solidFill>
+          <a:ln>
+            <a:noFill/>
+          </a:ln>
+        </p:spPr>
+        <p:txBody>
+          <a:bodyPr rtlCol="0" anchor="ctr" wrap="square" lIns="54864" rIns="54864" tIns="27432" bIns="27432">
+            <a:noAutofit/>
+          </a:bodyPr>
+          <a:lstStyle/>
+          <a:p>
+            <a:pPr algn="ctr">
+              <a:lnSpc>
+                <a:spcPct val="100000"/>
+              </a:lnSpc>
+            </a:pPr>
+            <a:r>
+              <a:rPr sz="1400" b="0" i="0">
+                <a:solidFill>
+                  <a:srgbClr val="494227"/>
+                </a:solidFill>
+              </a:rPr>
+              <a:t>사진을 넣어 주세요</a:t>
+            </a:r>
+          </a:p>
+        </p:txBody>
+      </p:sp>
+      <p:sp>
+        <p:nvSpPr>
+          <p:cNvPr id="4" name="장식"/>
+          <p:cNvSpPr/>
+          <p:nvPr/>
+        </p:nvSpPr>
+        <p:spPr>
+          <a:xfrm>
+            <a:off x="4358505" y="4251960"/>
+            <a:ext cx="1005840" cy="1005840"/>
+          </a:xfrm>
+          <a:prstGeom prst="ellipse">
+            <a:avLst/>
+          </a:prstGeom>
+          <a:solidFill>
+            <a:srgbClr val="EBDEAD"/>
+          </a:solidFill>
+          <a:ln>
+            <a:noFill/>
+          </a:ln>
+        </p:spPr>
+        <p:txBody>
+          <a:bodyPr rtlCol="0" anchor="ctr"/>
+          <a:lstStyle/>
+          <a:p>
+            <a:pPr algn="ctr"/>
+          </a:p>
+        </p:txBody>
+      </p:sp>
+      <p:sp>
+        <p:nvSpPr>
+          <p:cNvPr id="5" name="라벨"/>
+          <p:cNvSpPr txBox="1"/>
+          <p:nvPr/>
+        </p:nvSpPr>
+        <p:spPr>
+          <a:xfrm>
+            <a:off x="6827349" y="2148840"/>
+            <a:ext cx="4632844" cy="274320"/>
           </a:xfrm>
           <a:prstGeom prst="rect">
             <a:avLst/>
           </a:prstGeom>
-        </p:spPr>
-      </p:pic>
+          <a:noFill/>
+        </p:spPr>
+        <p:txBody>
+          <a:bodyPr wrap="square" lIns="54864" rIns="54864" tIns="27432" bIns="27432" anchor="t">
+            <a:noAutofit/>
+          </a:bodyPr>
+          <a:lstStyle/>
+          <a:p>
+            <a:pPr algn="l">
+              <a:lnSpc>
+                <a:spcPct val="115000"/>
+              </a:lnSpc>
+            </a:pPr>
+            <a:r>
+              <a:rPr sz="1000" b="1" i="0" spc="250">
+                <a:solidFill>
+                  <a:srgbClr val="26231F"/>
+                </a:solidFill>
+              </a:rPr>
+              <a:t>FAMILY ALBUM</a:t>
+            </a:r>
+          </a:p>
+        </p:txBody>
+      </p:sp>
       <p:sp>
         <p:nvSpPr>
           <p:cNvPr id="2" name="Title 1"/>
@@ -5522,8 +6047,8 @@
         </p:nvSpPr>
         <p:spPr>
           <a:xfrm>
-            <a:off x="853418" y="2057400"/>
-            <a:ext cx="6095847" cy="1554480"/>
+            <a:off x="6827349" y="2606040"/>
+            <a:ext cx="4632844" cy="1188720"/>
           </a:xfrm>
         </p:spPr>
         <p:txBody>
@@ -5538,9 +6063,9 @@
               </a:lnSpc>
             </a:pPr>
             <a:r>
-              <a:rPr sz="3600" b="1" i="0">
-                <a:solidFill>
-                  <a:srgbClr val="756110"/>
+              <a:rPr sz="4000" b="1" i="0">
+                <a:solidFill>
+                  <a:srgbClr val="26231F"/>
                 </a:solidFill>
               </a:rPr>
               <a:t>우리 가족 소개를 마칩니다</a:t>
@@ -5550,14 +6075,14 @@
       </p:sp>
       <p:sp>
         <p:nvSpPr>
-          <p:cNvPr id="4" name="한 줄 문구"/>
+          <p:cNvPr id="6" name="한 줄 문구"/>
           <p:cNvSpPr txBox="1"/>
           <p:nvPr/>
         </p:nvSpPr>
         <p:spPr>
           <a:xfrm>
-            <a:off x="853418" y="3749039"/>
-            <a:ext cx="6095847" cy="822960"/>
+            <a:off x="6827349" y="3886200"/>
+            <a:ext cx="4632844" cy="822960"/>
           </a:xfrm>
           <a:prstGeom prst="rect">
             <a:avLst/>
@@ -5576,9 +6101,9 @@
               </a:lnSpc>
             </a:pPr>
             <a:r>
-              <a:rPr sz="1700" b="0" i="1">
-                <a:solidFill>
-                  <a:srgbClr val="756110"/>
+              <a:rPr sz="1700" b="0" i="0">
+                <a:solidFill>
+                  <a:srgbClr val="26231F"/>
                 </a:solidFill>
               </a:rPr>
               <a:t>읽어 주셔서 고맙습니다</a:t>
@@ -5588,14 +6113,14 @@
       </p:sp>
       <p:sp>
         <p:nvSpPr>
-          <p:cNvPr id="5" name="안내 문구"/>
+          <p:cNvPr id="7" name="안내 문구"/>
           <p:cNvSpPr txBox="1"/>
           <p:nvPr/>
         </p:nvSpPr>
         <p:spPr>
           <a:xfrm>
-            <a:off x="853418" y="4617720"/>
-            <a:ext cx="6095847" cy="914400"/>
+            <a:off x="6827349" y="4754880"/>
+            <a:ext cx="4632844" cy="914400"/>
           </a:xfrm>
           <a:prstGeom prst="rect">
             <a:avLst/>
@@ -5616,7 +6141,7 @@
             <a:r>
               <a:rPr sz="1400" b="0" i="0">
                 <a:solidFill>
-                  <a:srgbClr val="666666"/>
+                  <a:srgbClr val="26231F"/>
                 </a:solidFill>
               </a:rPr>
               <a:t>고맙습니다 · 가족 이름</a:t>
@@ -5643,34 +6168,34 @@
         <a:sysClr val="window" lastClr="FFFFFF"/>
       </a:lt1>
       <a:dk2>
-        <a:srgbClr val="756110"/>
+        <a:srgbClr val="494227"/>
       </a:dk2>
       <a:lt2>
-        <a:srgbClr val="FDF9ED"/>
+        <a:srgbClr val="FBF8EC"/>
       </a:lt2>
       <a:accent1>
-        <a:srgbClr val="CEAB1C"/>
+        <a:srgbClr val="D8C579"/>
       </a:accent1>
       <a:accent2>
-        <a:srgbClr val="3B7791"/>
+        <a:srgbClr val="CEE198"/>
       </a:accent2>
       <a:accent3>
-        <a:srgbClr val="756110"/>
+        <a:srgbClr val="494227"/>
       </a:accent3>
       <a:accent4>
-        <a:srgbClr val="F9EFC8"/>
+        <a:srgbClr val="F6EFD5"/>
       </a:accent4>
       <a:accent5>
-        <a:srgbClr val="849156"/>
+        <a:srgbClr val="D3D388"/>
       </a:accent5>
       <a:accent6>
-        <a:srgbClr val="ACA070"/>
+        <a:srgbClr val="928E7D"/>
       </a:accent6>
       <a:hlink>
-        <a:srgbClr val="CEAB1C"/>
+        <a:srgbClr val="D8C579"/>
       </a:hlink>
       <a:folHlink>
-        <a:srgbClr val="756110"/>
+        <a:srgbClr val="494227"/>
       </a:folHlink>
     </a:clrScheme>
     <a:fontScheme name="Office">
